--- a/output/education/2026-03-29_healthcare-ai-ethics/healthcare-ai-ethics_slides_residents.pptx
+++ b/output/education/2026-03-29_healthcare-ai-ethics/healthcare-ai-ethics_slides_residents.pptx
@@ -3137,6 +3137,7 @@
               </a:defRPr>
             </a:pPr>
             <a:r>
+              <a:rPr/>
               <a:t>医療AIの倫理的懸念と実装戦略</a:t>
             </a:r>
           </a:p>
@@ -3151,7 +3152,7 @@
         <p:spPr>
           <a:xfrm>
             <a:off x="457200" y="1371600"/>
-            <a:ext cx="8229600" cy="365760"/>
+            <a:ext cx="8229600" cy="375920"/>
           </a:xfrm>
           <a:prstGeom prst="rect">
             <a:avLst/>
@@ -3173,6 +3174,7 @@
               </a:defRPr>
             </a:pPr>
             <a:r>
+              <a:rPr/>
               <a:t>— 研修医・専攻医向け（15分）</a:t>
             </a:r>
           </a:p>
@@ -3217,7 +3219,9 @@
           <a:bodyPr rtlCol="0" anchor="ctr"/>
           <a:lstStyle/>
           <a:p>
-            <a:pPr algn="ctr"/>
+            <a:pPr algn="ctr">
+              <a:defRPr/>
+            </a:pPr>
           </a:p>
         </p:txBody>
       </p:sp>
@@ -3252,6 +3256,7 @@
               </a:defRPr>
             </a:pPr>
             <a:r>
+              <a:rPr/>
               <a:t>Wubineh et al. BMC Medical Ethics. 2026;27:53.</a:t>
             </a:r>
           </a:p>
@@ -3296,7 +3301,9 @@
           <a:bodyPr rtlCol="0" anchor="ctr"/>
           <a:lstStyle/>
           <a:p>
-            <a:pPr algn="ctr"/>
+            <a:pPr algn="ctr">
+              <a:defRPr/>
+            </a:pPr>
           </a:p>
         </p:txBody>
       </p:sp>
@@ -3341,7 +3348,9 @@
           <a:bodyPr rtlCol="0" anchor="ctr"/>
           <a:lstStyle/>
           <a:p>
-            <a:pPr algn="ctr"/>
+            <a:pPr algn="ctr">
+              <a:defRPr/>
+            </a:pPr>
           </a:p>
         </p:txBody>
       </p:sp>
@@ -3376,19 +3385,23 @@
               </a:defRPr>
             </a:pPr>
             <a:r>
+              <a:rPr/>
               <a:t>「この患者、敗血症リスク“高”です」— AIがそう言ったら？</a:t>
             </a:r>
             <a:br/>
             <a:br/>
             <a:r>
+              <a:rPr/>
               <a:t>深夜の救急外来。38.5度の発熱と頻脈で搬送された72歳女性。</a:t>
             </a:r>
             <a:br/>
             <a:r>
+              <a:rPr/>
               <a:t>AIが「敗血症リスク: 高（92%）」とアラート。</a:t>
             </a:r>
             <a:br/>
             <a:r>
+              <a:rPr/>
               <a:t>しかし、あなたの臨床的印象は「単純性尿路感染症」。</a:t>
             </a:r>
           </a:p>
@@ -3429,7 +3442,7 @@
         <p:spPr>
           <a:xfrm>
             <a:off x="457200" y="274320"/>
-            <a:ext cx="8229600" cy="457200"/>
+            <a:ext cx="8229600" cy="482600"/>
           </a:xfrm>
           <a:prstGeom prst="rect">
             <a:avLst/>
@@ -3451,6 +3464,7 @@
               </a:defRPr>
             </a:pPr>
             <a:r>
+              <a:rPr/>
               <a:t>レビューの4つの提言 — 実装戦略</a:t>
             </a:r>
           </a:p>
@@ -3495,7 +3509,9 @@
           <a:bodyPr rtlCol="0" anchor="ctr"/>
           <a:lstStyle/>
           <a:p>
-            <a:pPr algn="ctr"/>
+            <a:pPr algn="ctr">
+              <a:defRPr/>
+            </a:pPr>
           </a:p>
         </p:txBody>
       </p:sp>
@@ -3538,7 +3554,9 @@
           <a:bodyPr rtlCol="0" anchor="ctr"/>
           <a:lstStyle/>
           <a:p>
-            <a:pPr algn="ctr"/>
+            <a:pPr algn="ctr">
+              <a:defRPr/>
+            </a:pPr>
           </a:p>
         </p:txBody>
       </p:sp>
@@ -3573,6 +3591,7 @@
               </a:defRPr>
             </a:pPr>
             <a:r>
+              <a:rPr/>
               <a:t>1</a:t>
             </a:r>
           </a:p>
@@ -3609,6 +3628,7 @@
               </a:defRPr>
             </a:pPr>
             <a:r>
+              <a:rPr/>
               <a:t>倫理原則・基準の遵守</a:t>
             </a:r>
           </a:p>
@@ -3622,7 +3642,7 @@
         </p:nvSpPr>
         <p:spPr>
           <a:xfrm>
-            <a:off x="1828800" y="1371600"/>
+            <a:off x="1828800" y="1417319"/>
             <a:ext cx="6858000" cy="365760"/>
           </a:xfrm>
           <a:prstGeom prst="rect">
@@ -3645,6 +3665,7 @@
               </a:defRPr>
             </a:pPr>
             <a:r>
+              <a:rPr/>
               <a:t>バイオエシックス4原則をAI文脈に再解釈</a:t>
             </a:r>
           </a:p>
@@ -3689,7 +3710,9 @@
           <a:bodyPr rtlCol="0" anchor="ctr"/>
           <a:lstStyle/>
           <a:p>
-            <a:pPr algn="ctr"/>
+            <a:pPr algn="ctr">
+              <a:defRPr/>
+            </a:pPr>
           </a:p>
         </p:txBody>
       </p:sp>
@@ -3724,6 +3747,7 @@
               </a:defRPr>
             </a:pPr>
             <a:r>
+              <a:rPr/>
               <a:t>2</a:t>
             </a:r>
           </a:p>
@@ -3760,6 +3784,7 @@
               </a:defRPr>
             </a:pPr>
             <a:r>
+              <a:rPr/>
               <a:t>透明性の確保</a:t>
             </a:r>
           </a:p>
@@ -3773,7 +3798,7 @@
         </p:nvSpPr>
         <p:spPr>
           <a:xfrm>
-            <a:off x="1828800" y="2286000"/>
+            <a:off x="1828800" y="2331720"/>
             <a:ext cx="6858000" cy="365760"/>
           </a:xfrm>
           <a:prstGeom prst="rect">
@@ -3796,6 +3821,7 @@
               </a:defRPr>
             </a:pPr>
             <a:r>
+              <a:rPr/>
               <a:t>XAI手法の実装、意思決定プロセスの可視化</a:t>
             </a:r>
           </a:p>
@@ -3840,7 +3866,9 @@
           <a:bodyPr rtlCol="0" anchor="ctr"/>
           <a:lstStyle/>
           <a:p>
-            <a:pPr algn="ctr"/>
+            <a:pPr algn="ctr">
+              <a:defRPr/>
+            </a:pPr>
           </a:p>
         </p:txBody>
       </p:sp>
@@ -3875,6 +3903,7 @@
               </a:defRPr>
             </a:pPr>
             <a:r>
+              <a:rPr/>
               <a:t>3</a:t>
             </a:r>
           </a:p>
@@ -3911,6 +3940,7 @@
               </a:defRPr>
             </a:pPr>
             <a:r>
+              <a:rPr/>
               <a:t>継続的な監視・監査</a:t>
             </a:r>
           </a:p>
@@ -3924,7 +3954,7 @@
         </p:nvSpPr>
         <p:spPr>
           <a:xfrm>
-            <a:off x="1828800" y="3200400"/>
+            <a:off x="1828800" y="3246120"/>
             <a:ext cx="6858000" cy="365760"/>
           </a:xfrm>
           <a:prstGeom prst="rect">
@@ -3947,6 +3977,7 @@
               </a:defRPr>
             </a:pPr>
             <a:r>
+              <a:rPr/>
               <a:t>デプロイ後のバイアスモニタリング、ドリフト検出</a:t>
             </a:r>
           </a:p>
@@ -3991,7 +4022,9 @@
           <a:bodyPr rtlCol="0" anchor="ctr"/>
           <a:lstStyle/>
           <a:p>
-            <a:pPr algn="ctr"/>
+            <a:pPr algn="ctr">
+              <a:defRPr/>
+            </a:pPr>
           </a:p>
         </p:txBody>
       </p:sp>
@@ -4026,6 +4059,7 @@
               </a:defRPr>
             </a:pPr>
             <a:r>
+              <a:rPr/>
               <a:t>4</a:t>
             </a:r>
           </a:p>
@@ -4062,6 +4096,7 @@
               </a:defRPr>
             </a:pPr>
             <a:r>
+              <a:rPr/>
               <a:t>多職種ガバナンス</a:t>
             </a:r>
           </a:p>
@@ -4075,7 +4110,7 @@
         </p:nvSpPr>
         <p:spPr>
           <a:xfrm>
-            <a:off x="1828800" y="4114800"/>
+            <a:off x="1828800" y="4160520"/>
             <a:ext cx="6858000" cy="365760"/>
           </a:xfrm>
           <a:prstGeom prst="rect">
@@ -4098,6 +4133,7 @@
               </a:defRPr>
             </a:pPr>
             <a:r>
+              <a:rPr/>
               <a:t>開発者・臨床医・患者・倫理学者・規制当局の協働</a:t>
             </a:r>
           </a:p>
@@ -4142,7 +4178,9 @@
           <a:bodyPr rtlCol="0" anchor="ctr"/>
           <a:lstStyle/>
           <a:p>
-            <a:pPr algn="ctr"/>
+            <a:pPr algn="ctr">
+              <a:defRPr/>
+            </a:pPr>
           </a:p>
         </p:txBody>
       </p:sp>
@@ -4187,7 +4225,9 @@
           <a:bodyPr rtlCol="0" anchor="ctr"/>
           <a:lstStyle/>
           <a:p>
-            <a:pPr algn="ctr"/>
+            <a:pPr algn="ctr">
+              <a:defRPr/>
+            </a:pPr>
           </a:p>
         </p:txBody>
       </p:sp>
@@ -4200,7 +4240,7 @@
         <p:spPr>
           <a:xfrm>
             <a:off x="1143000" y="4645152"/>
-            <a:ext cx="6949440" cy="219456"/>
+            <a:ext cx="6949440" cy="287020"/>
           </a:xfrm>
           <a:prstGeom prst="rect">
             <a:avLst/>
@@ -4222,6 +4262,7 @@
               </a:defRPr>
             </a:pPr>
             <a:r>
+              <a:rPr/>
               <a:t>あなたの病院でAI導入を検討するとき、この4つのうちどれが最も不足しているか？</a:t>
             </a:r>
           </a:p>
@@ -4262,7 +4303,7 @@
         <p:spPr>
           <a:xfrm>
             <a:off x="457200" y="274320"/>
-            <a:ext cx="8229600" cy="457200"/>
+            <a:ext cx="8229600" cy="482600"/>
           </a:xfrm>
           <a:prstGeom prst="rect">
             <a:avLst/>
@@ -4284,6 +4325,7 @@
               </a:defRPr>
             </a:pPr>
             <a:r>
+              <a:rPr/>
               <a:t>持ち帰りの問い — 明日からの臨床で</a:t>
             </a:r>
           </a:p>
@@ -4328,7 +4370,9 @@
           <a:bodyPr rtlCol="0" anchor="ctr"/>
           <a:lstStyle/>
           <a:p>
-            <a:pPr algn="ctr"/>
+            <a:pPr algn="ctr">
+              <a:defRPr/>
+            </a:pPr>
           </a:p>
         </p:txBody>
       </p:sp>
@@ -4371,7 +4415,9 @@
           <a:bodyPr rtlCol="0" anchor="ctr"/>
           <a:lstStyle/>
           <a:p>
-            <a:pPr algn="ctr"/>
+            <a:pPr algn="ctr">
+              <a:defRPr/>
+            </a:pPr>
           </a:p>
         </p:txBody>
       </p:sp>
@@ -4406,6 +4452,7 @@
               </a:defRPr>
             </a:pPr>
             <a:r>
+              <a:rPr/>
               <a:t>1</a:t>
             </a:r>
           </a:p>
@@ -4442,6 +4489,7 @@
               </a:defRPr>
             </a:pPr>
             <a:r>
+              <a:rPr/>
               <a:t>AIツールの判断根拠を、患者に説明できるか？</a:t>
             </a:r>
           </a:p>
@@ -4486,7 +4534,9 @@
           <a:bodyPr rtlCol="0" anchor="ctr"/>
           <a:lstStyle/>
           <a:p>
-            <a:pPr algn="ctr"/>
+            <a:pPr algn="ctr">
+              <a:defRPr/>
+            </a:pPr>
           </a:p>
         </p:txBody>
       </p:sp>
@@ -4521,6 +4571,7 @@
               </a:defRPr>
             </a:pPr>
             <a:r>
+              <a:rPr/>
               <a:t>2</a:t>
             </a:r>
           </a:p>
@@ -4557,6 +4608,7 @@
               </a:defRPr>
             </a:pPr>
             <a:r>
+              <a:rPr/>
               <a:t>訓練データに、目の前の患者と同じ集団は含まれているか？</a:t>
             </a:r>
           </a:p>
@@ -4601,7 +4653,9 @@
           <a:bodyPr rtlCol="0" anchor="ctr"/>
           <a:lstStyle/>
           <a:p>
-            <a:pPr algn="ctr"/>
+            <a:pPr algn="ctr">
+              <a:defRPr/>
+            </a:pPr>
           </a:p>
         </p:txBody>
       </p:sp>
@@ -4636,6 +4690,7 @@
               </a:defRPr>
             </a:pPr>
             <a:r>
+              <a:rPr/>
               <a:t>3</a:t>
             </a:r>
           </a:p>
@@ -4672,6 +4727,7 @@
               </a:defRPr>
             </a:pPr>
             <a:r>
+              <a:rPr/>
               <a:t>AIと自分の判断が食い違ったとき、思考プロセスを言語化できるか？</a:t>
             </a:r>
           </a:p>
@@ -4712,7 +4768,7 @@
         <p:spPr>
           <a:xfrm>
             <a:off x="457200" y="274320"/>
-            <a:ext cx="8229600" cy="457200"/>
+            <a:ext cx="8229600" cy="482600"/>
           </a:xfrm>
           <a:prstGeom prst="rect">
             <a:avLst/>
@@ -4734,6 +4790,7 @@
               </a:defRPr>
             </a:pPr>
             <a:r>
+              <a:rPr/>
               <a:t>今日のゴール — この15分で手に入れるもの</a:t>
             </a:r>
           </a:p>
@@ -4778,7 +4835,9 @@
           <a:bodyPr rtlCol="0" anchor="ctr"/>
           <a:lstStyle/>
           <a:p>
-            <a:pPr algn="ctr"/>
+            <a:pPr algn="ctr">
+              <a:defRPr/>
+            </a:pPr>
           </a:p>
         </p:txBody>
       </p:sp>
@@ -4821,7 +4880,9 @@
           <a:bodyPr rtlCol="0" anchor="ctr"/>
           <a:lstStyle/>
           <a:p>
-            <a:pPr algn="ctr"/>
+            <a:pPr algn="ctr">
+              <a:defRPr/>
+            </a:pPr>
           </a:p>
         </p:txBody>
       </p:sp>
@@ -4856,6 +4917,7 @@
               </a:defRPr>
             </a:pPr>
             <a:r>
+              <a:rPr/>
               <a:t>1</a:t>
             </a:r>
           </a:p>
@@ -4870,7 +4932,7 @@
         <p:spPr>
           <a:xfrm>
             <a:off x="1828800" y="1143000"/>
-            <a:ext cx="6858000" cy="365760"/>
+            <a:ext cx="6858000" cy="375920"/>
           </a:xfrm>
           <a:prstGeom prst="rect">
             <a:avLst/>
@@ -4892,6 +4954,7 @@
               </a:defRPr>
             </a:pPr>
             <a:r>
+              <a:rPr/>
               <a:t>説明できる</a:t>
             </a:r>
           </a:p>
@@ -4928,6 +4991,7 @@
               </a:defRPr>
             </a:pPr>
             <a:r>
+              <a:rPr/>
               <a:t>医療AIの倫理的懸念を6カテゴリで構造的に整理できる</a:t>
             </a:r>
           </a:p>
@@ -4972,7 +5036,9 @@
           <a:bodyPr rtlCol="0" anchor="ctr"/>
           <a:lstStyle/>
           <a:p>
-            <a:pPr algn="ctr"/>
+            <a:pPr algn="ctr">
+              <a:defRPr/>
+            </a:pPr>
           </a:p>
         </p:txBody>
       </p:sp>
@@ -5007,6 +5073,7 @@
               </a:defRPr>
             </a:pPr>
             <a:r>
+              <a:rPr/>
               <a:t>2</a:t>
             </a:r>
           </a:p>
@@ -5021,7 +5088,7 @@
         <p:spPr>
           <a:xfrm>
             <a:off x="1828800" y="2331720"/>
-            <a:ext cx="6858000" cy="365760"/>
+            <a:ext cx="6858000" cy="375920"/>
           </a:xfrm>
           <a:prstGeom prst="rect">
             <a:avLst/>
@@ -5043,6 +5110,7 @@
               </a:defRPr>
             </a:pPr>
             <a:r>
+              <a:rPr/>
               <a:t>分析できる</a:t>
             </a:r>
           </a:p>
@@ -5079,6 +5147,7 @@
               </a:defRPr>
             </a:pPr>
             <a:r>
+              <a:rPr/>
               <a:t>臨床シナリオにおけるAI判断のバイアス源を特定できる</a:t>
             </a:r>
           </a:p>
@@ -5123,7 +5192,9 @@
           <a:bodyPr rtlCol="0" anchor="ctr"/>
           <a:lstStyle/>
           <a:p>
-            <a:pPr algn="ctr"/>
+            <a:pPr algn="ctr">
+              <a:defRPr/>
+            </a:pPr>
           </a:p>
         </p:txBody>
       </p:sp>
@@ -5158,6 +5229,7 @@
               </a:defRPr>
             </a:pPr>
             <a:r>
+              <a:rPr/>
               <a:t>3</a:t>
             </a:r>
           </a:p>
@@ -5172,7 +5244,7 @@
         <p:spPr>
           <a:xfrm>
             <a:off x="1828800" y="3520439"/>
-            <a:ext cx="6858000" cy="365760"/>
+            <a:ext cx="6858000" cy="375920"/>
           </a:xfrm>
           <a:prstGeom prst="rect">
             <a:avLst/>
@@ -5194,6 +5266,7 @@
               </a:defRPr>
             </a:pPr>
             <a:r>
+              <a:rPr/>
               <a:t>計画できる</a:t>
             </a:r>
           </a:p>
@@ -5230,6 +5303,7 @@
               </a:defRPr>
             </a:pPr>
             <a:r>
+              <a:rPr/>
               <a:t>AIの推奨と自身の臨床判断を統合するプロセスを言語化できる</a:t>
             </a:r>
           </a:p>
@@ -5270,7 +5344,7 @@
         <p:spPr>
           <a:xfrm>
             <a:off x="457200" y="274320"/>
-            <a:ext cx="8229600" cy="457200"/>
+            <a:ext cx="8229600" cy="482600"/>
           </a:xfrm>
           <a:prstGeom prst="rect">
             <a:avLst/>
@@ -5292,6 +5366,7 @@
               </a:defRPr>
             </a:pPr>
             <a:r>
+              <a:rPr/>
               <a:t>臨床倫理の4原則 × AI</a:t>
             </a:r>
           </a:p>
@@ -5336,7 +5411,9 @@
           <a:bodyPr rtlCol="0" anchor="ctr"/>
           <a:lstStyle/>
           <a:p>
-            <a:pPr algn="ctr"/>
+            <a:pPr algn="ctr">
+              <a:defRPr/>
+            </a:pPr>
           </a:p>
         </p:txBody>
       </p:sp>
@@ -5776,7 +5853,9 @@
           <a:bodyPr rtlCol="0" anchor="ctr"/>
           <a:lstStyle/>
           <a:p>
-            <a:pPr algn="ctr"/>
+            <a:pPr algn="ctr">
+              <a:defRPr/>
+            </a:pPr>
           </a:p>
         </p:txBody>
       </p:sp>
@@ -5821,7 +5900,9 @@
           <a:bodyPr rtlCol="0" anchor="ctr"/>
           <a:lstStyle/>
           <a:p>
-            <a:pPr algn="ctr"/>
+            <a:pPr algn="ctr">
+              <a:defRPr/>
+            </a:pPr>
           </a:p>
         </p:txBody>
       </p:sp>
@@ -5856,6 +5937,7 @@
               </a:defRPr>
             </a:pPr>
             <a:r>
+              <a:rPr/>
               <a:t>この4原則をAI文脈に「再解釈」する — それが今日のテーマ。</a:t>
             </a:r>
           </a:p>
@@ -5896,7 +5978,7 @@
         <p:spPr>
           <a:xfrm>
             <a:off x="457200" y="274320"/>
-            <a:ext cx="8229600" cy="457200"/>
+            <a:ext cx="8229600" cy="482600"/>
           </a:xfrm>
           <a:prstGeom prst="rect">
             <a:avLst/>
@@ -5918,6 +6000,7 @@
               </a:defRPr>
             </a:pPr>
             <a:r>
+              <a:rPr/>
               <a:t>6つの倫理的懸念カテゴリ</a:t>
             </a:r>
           </a:p>
@@ -5962,7 +6045,9 @@
           <a:bodyPr rtlCol="0" anchor="ctr"/>
           <a:lstStyle/>
           <a:p>
-            <a:pPr algn="ctr"/>
+            <a:pPr algn="ctr">
+              <a:defRPr/>
+            </a:pPr>
           </a:p>
         </p:txBody>
       </p:sp>
@@ -5997,6 +6082,7 @@
               </a:defRPr>
             </a:pPr>
             <a:r>
+              <a:rPr/>
               <a:t>Wubineh et al.（2026）— 22件の実証研究から抽出</a:t>
             </a:r>
           </a:p>
@@ -6582,7 +6668,7 @@
         <p:spPr>
           <a:xfrm>
             <a:off x="457200" y="274320"/>
-            <a:ext cx="8229600" cy="457200"/>
+            <a:ext cx="8229600" cy="482600"/>
           </a:xfrm>
           <a:prstGeom prst="rect">
             <a:avLst/>
@@ -6604,6 +6690,7 @@
               </a:defRPr>
             </a:pPr>
             <a:r>
+              <a:rPr/>
               <a:t>深掘り (1): 透明性と信頼</a:t>
             </a:r>
           </a:p>
@@ -6648,7 +6735,9 @@
           <a:bodyPr rtlCol="0" anchor="ctr"/>
           <a:lstStyle/>
           <a:p>
-            <a:pPr algn="ctr"/>
+            <a:pPr algn="ctr">
+              <a:defRPr/>
+            </a:pPr>
           </a:p>
         </p:txBody>
       </p:sp>
@@ -6661,7 +6750,7 @@
         <p:spPr>
           <a:xfrm>
             <a:off x="457200" y="914400"/>
-            <a:ext cx="8229600" cy="365760"/>
+            <a:ext cx="8229600" cy="375920"/>
           </a:xfrm>
           <a:prstGeom prst="rect">
             <a:avLst/>
@@ -6683,6 +6772,7 @@
               </a:defRPr>
             </a:pPr>
             <a:r>
+              <a:rPr/>
               <a:t>ブラックボックス問題</a:t>
             </a:r>
           </a:p>
@@ -6720,6 +6810,7 @@
               <a:buChar char="●"/>
             </a:pPr>
             <a:r>
+              <a:rPr/>
               <a:t>ブラックボックス: 入力→出力は分かるが、中間の推論過程が不透明</a:t>
             </a:r>
           </a:p>
@@ -6734,6 +6825,7 @@
               <a:buChar char="●"/>
             </a:pPr>
             <a:r>
+              <a:rPr/>
               <a:t>XAI（Explainable AI）: 判断根拠を可視化（SHAP、LIME）</a:t>
             </a:r>
           </a:p>
@@ -6748,6 +6840,7 @@
               <a:buChar char="●"/>
             </a:pPr>
             <a:r>
+              <a:rPr/>
               <a:t>しかしXAIの「説明」≠ 人間の「理解」</a:t>
             </a:r>
           </a:p>
@@ -6762,6 +6855,7 @@
               <a:buChar char="●"/>
             </a:pPr>
             <a:r>
+              <a:rPr/>
               <a:t>臨床的含意: 「AIがそう言っているから」では説明責任を果たせない</a:t>
             </a:r>
           </a:p>
@@ -6806,7 +6900,9 @@
           <a:bodyPr rtlCol="0" anchor="ctr"/>
           <a:lstStyle/>
           <a:p>
-            <a:pPr algn="ctr"/>
+            <a:pPr algn="ctr">
+              <a:defRPr/>
+            </a:pPr>
           </a:p>
         </p:txBody>
       </p:sp>
@@ -6851,7 +6947,9 @@
           <a:bodyPr rtlCol="0" anchor="ctr"/>
           <a:lstStyle/>
           <a:p>
-            <a:pPr algn="ctr"/>
+            <a:pPr algn="ctr">
+              <a:defRPr/>
+            </a:pPr>
           </a:p>
         </p:txBody>
       </p:sp>
@@ -6864,7 +6962,7 @@
         <p:spPr>
           <a:xfrm>
             <a:off x="1143000" y="4005072"/>
-            <a:ext cx="6949440" cy="310896"/>
+            <a:ext cx="6949440" cy="322579"/>
           </a:xfrm>
           <a:prstGeom prst="rect">
             <a:avLst/>
@@ -6886,6 +6984,7 @@
               </a:defRPr>
             </a:pPr>
             <a:r>
+              <a:rPr/>
               <a:t>あなたが使うAIツールは、判断の根拠を示してくれるか？</a:t>
             </a:r>
           </a:p>
@@ -6926,7 +7025,7 @@
         <p:spPr>
           <a:xfrm>
             <a:off x="457200" y="274320"/>
-            <a:ext cx="8229600" cy="457200"/>
+            <a:ext cx="8229600" cy="482600"/>
           </a:xfrm>
           <a:prstGeom prst="rect">
             <a:avLst/>
@@ -6948,6 +7047,7 @@
               </a:defRPr>
             </a:pPr>
             <a:r>
+              <a:rPr/>
               <a:t>深掘り (2): バイアスの3層構造</a:t>
             </a:r>
           </a:p>
@@ -6992,7 +7092,9 @@
           <a:bodyPr rtlCol="0" anchor="ctr"/>
           <a:lstStyle/>
           <a:p>
-            <a:pPr algn="ctr"/>
+            <a:pPr algn="ctr">
+              <a:defRPr/>
+            </a:pPr>
           </a:p>
         </p:txBody>
       </p:sp>
@@ -7358,7 +7460,9 @@
           <a:bodyPr rtlCol="0" anchor="ctr"/>
           <a:lstStyle/>
           <a:p>
-            <a:pPr algn="ctr"/>
+            <a:pPr algn="ctr">
+              <a:defRPr/>
+            </a:pPr>
           </a:p>
         </p:txBody>
       </p:sp>
@@ -7403,7 +7507,9 @@
           <a:bodyPr rtlCol="0" anchor="ctr"/>
           <a:lstStyle/>
           <a:p>
-            <a:pPr algn="ctr"/>
+            <a:pPr algn="ctr">
+              <a:defRPr/>
+            </a:pPr>
           </a:p>
         </p:txBody>
       </p:sp>
@@ -7438,14 +7544,17 @@
               </a:defRPr>
             </a:pPr>
             <a:r>
+              <a:rPr/>
               <a:t>Fairness Impossibility Theorem:</a:t>
             </a:r>
             <a:br/>
             <a:r>
+              <a:rPr/>
               <a:t>公正性の複数指標を同時に全て満たすことは数学的に不可能。</a:t>
             </a:r>
             <a:br/>
             <a:r>
+              <a:rPr/>
               <a:t>どの指標を優先するかは「倫理的判断」であり、技術的判断ではない。</a:t>
             </a:r>
           </a:p>
@@ -7486,7 +7595,7 @@
         <p:spPr>
           <a:xfrm>
             <a:off x="457200" y="274320"/>
-            <a:ext cx="8229600" cy="457200"/>
+            <a:ext cx="8229600" cy="482600"/>
           </a:xfrm>
           <a:prstGeom prst="rect">
             <a:avLst/>
@@ -7508,6 +7617,7 @@
               </a:defRPr>
             </a:pPr>
             <a:r>
+              <a:rPr/>
               <a:t>深掘り (3): 説明責任 — 責任の三角形</a:t>
             </a:r>
           </a:p>
@@ -7552,7 +7662,9 @@
           <a:bodyPr rtlCol="0" anchor="ctr"/>
           <a:lstStyle/>
           <a:p>
-            <a:pPr algn="ctr"/>
+            <a:pPr algn="ctr">
+              <a:defRPr/>
+            </a:pPr>
           </a:p>
         </p:txBody>
       </p:sp>
@@ -7595,7 +7707,9 @@
           <a:bodyPr rtlCol="0" anchor="ctr"/>
           <a:lstStyle/>
           <a:p>
-            <a:pPr algn="ctr"/>
+            <a:pPr algn="ctr">
+              <a:defRPr/>
+            </a:pPr>
           </a:p>
         </p:txBody>
       </p:sp>
@@ -7630,6 +7744,7 @@
               </a:defRPr>
             </a:pPr>
             <a:r>
+              <a:rPr/>
               <a:t>開発企業（アルゴリズム設計）</a:t>
             </a:r>
           </a:p>
@@ -7676,7 +7791,9 @@
           <a:bodyPr rtlCol="0" anchor="ctr"/>
           <a:lstStyle/>
           <a:p>
-            <a:pPr algn="ctr"/>
+            <a:pPr algn="ctr">
+              <a:defRPr/>
+            </a:pPr>
           </a:p>
         </p:txBody>
       </p:sp>
@@ -7711,6 +7828,7 @@
               </a:defRPr>
             </a:pPr>
             <a:r>
+              <a:rPr/>
               <a:t>医師（最終判断）</a:t>
             </a:r>
           </a:p>
@@ -7757,7 +7875,9 @@
           <a:bodyPr rtlCol="0" anchor="ctr"/>
           <a:lstStyle/>
           <a:p>
-            <a:pPr algn="ctr"/>
+            <a:pPr algn="ctr">
+              <a:defRPr/>
+            </a:pPr>
           </a:p>
         </p:txBody>
       </p:sp>
@@ -7792,6 +7912,7 @@
               </a:defRPr>
             </a:pPr>
             <a:r>
+              <a:rPr/>
               <a:t>医療機関（導入決定）</a:t>
             </a:r>
           </a:p>
@@ -7829,6 +7950,7 @@
               <a:buChar char="●"/>
             </a:pPr>
             <a:r>
+              <a:rPr/>
               <a:t>現状: 日本では医師の最終判断責任が原則</a:t>
             </a:r>
           </a:p>
@@ -7843,6 +7965,7 @@
               <a:buChar char="●"/>
             </a:pPr>
             <a:r>
+              <a:rPr/>
               <a:t>課題: AIが「推奨」し医師が「承認」するだけの運用になった場合は？</a:t>
             </a:r>
           </a:p>
@@ -7857,6 +7980,7 @@
               <a:buChar char="●"/>
             </a:pPr>
             <a:r>
+              <a:rPr/>
               <a:t>EU AI法（2026年8月適用開始）: 高リスクAIに技術文書・人間の監視を義務化</a:t>
             </a:r>
           </a:p>
@@ -7897,7 +8021,7 @@
         <p:spPr>
           <a:xfrm>
             <a:off x="457200" y="274320"/>
-            <a:ext cx="8229600" cy="457200"/>
+            <a:ext cx="8229600" cy="482600"/>
           </a:xfrm>
           <a:prstGeom prst="rect">
             <a:avLst/>
@@ -7919,6 +8043,7 @@
               </a:defRPr>
             </a:pPr>
             <a:r>
+              <a:rPr/>
               <a:t>ペアディスカッション（3分間）</a:t>
             </a:r>
           </a:p>
@@ -7963,7 +8088,9 @@
           <a:bodyPr rtlCol="0" anchor="ctr"/>
           <a:lstStyle/>
           <a:p>
-            <a:pPr algn="ctr"/>
+            <a:pPr algn="ctr">
+              <a:defRPr/>
+            </a:pPr>
           </a:p>
         </p:txBody>
       </p:sp>
@@ -7998,6 +8125,7 @@
               </a:defRPr>
             </a:pPr>
             <a:r>
+              <a:rPr/>
               <a:t>冒頭のシナリオに戻ろう — AI「敗血症リスク92%」 vs あなた「UTI」</a:t>
             </a:r>
           </a:p>
@@ -8035,6 +8163,7 @@
               <a:buChar char="●"/>
             </a:pPr>
             <a:r>
+              <a:rPr/>
               <a:t>1. このAIシステムの透明性はどうか？（92%の根拠は見えるか？）</a:t>
             </a:r>
           </a:p>
@@ -8049,6 +8178,7 @@
               <a:buChar char="●"/>
             </a:pPr>
             <a:r>
+              <a:rPr/>
               <a:t>2. この患者に特有のバイアスリスクはないか？（年齢、性別、併存疾患）</a:t>
             </a:r>
           </a:p>
@@ -8063,6 +8193,7 @@
               <a:buChar char="●"/>
             </a:pPr>
             <a:r>
+              <a:rPr/>
               <a:t>3. AIの判断を採用/不採用にした場合、説明責任はどこにあるか？</a:t>
             </a:r>
           </a:p>
@@ -8077,6 +8208,7 @@
               <a:buChar char="●"/>
             </a:pPr>
             <a:r>
+              <a:rPr/>
               <a:t>4. 「AIを使わないことの倫理的責任」はあるか？</a:t>
             </a:r>
           </a:p>
@@ -8117,7 +8249,7 @@
         <p:spPr>
           <a:xfrm>
             <a:off x="457200" y="274320"/>
-            <a:ext cx="8229600" cy="457200"/>
+            <a:ext cx="8229600" cy="482600"/>
           </a:xfrm>
           <a:prstGeom prst="rect">
             <a:avLst/>
@@ -8139,6 +8271,7 @@
               </a:defRPr>
             </a:pPr>
             <a:r>
+              <a:rPr/>
               <a:t>全体共有 + 振り返り</a:t>
             </a:r>
           </a:p>
@@ -8183,7 +8316,9 @@
           <a:bodyPr rtlCol="0" anchor="ctr"/>
           <a:lstStyle/>
           <a:p>
-            <a:pPr algn="ctr"/>
+            <a:pPr algn="ctr">
+              <a:defRPr/>
+            </a:pPr>
           </a:p>
         </p:txBody>
       </p:sp>
@@ -8218,6 +8353,7 @@
               </a:defRPr>
             </a:pPr>
             <a:r>
+              <a:rPr/>
               <a:t>各ペアから1つずつ意見を共有（30秒 × 数ペア）</a:t>
             </a:r>
           </a:p>
@@ -8254,6 +8390,7 @@
               </a:defRPr>
             </a:pPr>
             <a:r>
+              <a:rPr/>
               <a:t>ファシリテーターが6カテゴリへのマッピングを補足</a:t>
             </a:r>
           </a:p>
@@ -8298,7 +8435,9 @@
           <a:bodyPr rtlCol="0" anchor="ctr"/>
           <a:lstStyle/>
           <a:p>
-            <a:pPr algn="ctr"/>
+            <a:pPr algn="ctr">
+              <a:defRPr/>
+            </a:pPr>
           </a:p>
         </p:txBody>
       </p:sp>
@@ -8343,7 +8482,9 @@
           <a:bodyPr rtlCol="0" anchor="ctr"/>
           <a:lstStyle/>
           <a:p>
-            <a:pPr algn="ctr"/>
+            <a:pPr algn="ctr">
+              <a:defRPr/>
+            </a:pPr>
           </a:p>
         </p:txBody>
       </p:sp>
@@ -8378,14 +8519,17 @@
               </a:defRPr>
             </a:pPr>
             <a:r>
+              <a:rPr/>
               <a:t>AIは「第二の意見」であり、「最終判断」ではない。</a:t>
             </a:r>
             <a:br/>
             <a:r>
+              <a:rPr/>
               <a:t>しかし、AIの指摘を無視する場合にも、</a:t>
             </a:r>
             <a:br/>
             <a:r>
+              <a:rPr/>
               <a:t>その根拠を言語化する責任がある。</a:t>
             </a:r>
           </a:p>
